--- a/presentation/Report_ppt-final.pptx
+++ b/presentation/Report_ppt-final.pptx
@@ -469,34 +469,6 @@
           <a:bodyPr/>
           <a:lstStyle/>
           <a:p>
-            <a:r>
-              <a:rPr lang="en-AE" sz="1200" kern="1200" dirty="0">
-                <a:solidFill>
-                  <a:schemeClr val="tx1"/>
-                </a:solidFill>
-                <a:effectLst/>
-                <a:latin typeface="+mn-lt"/>
-                <a:ea typeface="+mn-ea"/>
-                <a:cs typeface="+mn-cs"/>
-              </a:rPr>
-              <a:t>Let me start with the main problem. Air pollution is not just an environmental issue; it is also a serious public-health problem. PM2.5 is especially important because these particles are very small and can enter deep into the lungs, contributing to respiratory and cardiovascular disease. According to the World Health Organization, air pollution is linked to around 7 million premature deaths globally each year.</a:t>
-            </a:r>
-          </a:p>
-          <a:p>
-            <a:r>
-              <a:rPr lang="en-AE" sz="1200" kern="1200" dirty="0">
-                <a:solidFill>
-                  <a:schemeClr val="tx1"/>
-                </a:solidFill>
-                <a:effectLst/>
-                <a:latin typeface="+mn-lt"/>
-                <a:ea typeface="+mn-ea"/>
-                <a:cs typeface="+mn-cs"/>
-              </a:rPr>
-              <a:t>Now, the difficult part is that PM2.5 does not behave in a simple way. It is affected by many interacting factors, such as weather, emissions, wind movement, and geography. For example, even if Downtown Toronto has low PM2.5 right now, polluted air from another nearby area may move toward Downtown if the wind is blowing in that direction. That means the concentration can rise in the next few hours, even before the target station itself shows a strong increase.</a:t>
-            </a:r>
-          </a:p>
-          <a:p>
             <a:endParaRPr lang="en-AE" sz="1200" kern="1200" dirty="0">
               <a:solidFill>
                 <a:schemeClr val="tx1"/>
@@ -506,34 +478,6 @@
               <a:ea typeface="+mn-ea"/>
               <a:cs typeface="+mn-cs"/>
             </a:endParaRPr>
-          </a:p>
-          <a:p>
-            <a:r>
-              <a:rPr lang="en-AE" sz="1200" kern="1200" dirty="0">
-                <a:solidFill>
-                  <a:schemeClr val="tx1"/>
-                </a:solidFill>
-                <a:effectLst/>
-                <a:latin typeface="+mn-lt"/>
-                <a:ea typeface="+mn-ea"/>
-                <a:cs typeface="+mn-cs"/>
-              </a:rPr>
-              <a:t>Traditional forecasting models can capture historical trends, but they may miss this physical movement of pollution between stations. On the other hand, advanced graph neural networks and Transformer-based models can capture spatial transport, but they are often complex and computationally heavy.</a:t>
-            </a:r>
-          </a:p>
-          <a:p>
-            <a:r>
-              <a:rPr lang="en-AE" sz="1200" kern="1200" dirty="0">
-                <a:solidFill>
-                  <a:schemeClr val="tx1"/>
-                </a:solidFill>
-                <a:effectLst/>
-                <a:latin typeface="+mn-lt"/>
-                <a:ea typeface="+mn-ea"/>
-                <a:cs typeface="+mn-cs"/>
-              </a:rPr>
-              <a:t>So the motivation for this project is simple: instead of depending only on very complex models, can we create lightweight, physically meaningful wind-aware features that explain how pollution moves, and then use those features across different forecasting models?</a:t>
-            </a:r>
           </a:p>
         </p:txBody>
       </p:sp>
@@ -635,10 +579,7 @@
           <a:bodyPr/>
           <a:lstStyle/>
           <a:p>
-            <a:r>
-              <a:rPr lang="en-US" dirty="0"/>
-              <a:t>Five feature layers from the codebase, used as the basis for the ablation study. Each ablation recipe (base6, diffusion9, with_pollutants, base+pollutants) adds layers cumulatively so we can isolate how much predictive value each layer contributes on its own. Be ready to clarify: layer 4 lists pm25_lag1 through lag12 plus two rolling means - if asked why that's labeled (7) rather than (14), clarify which specific lag subset and rolling windows are actually used in the deployed recipe.</a:t>
-            </a:r>
+            <a:endParaRPr lang="en-US" dirty="0"/>
           </a:p>
         </p:txBody>
       </p:sp>
@@ -1442,20 +1383,6 @@
           <a:bodyPr/>
           <a:lstStyle/>
           <a:p>
-            <a:r>
-              <a:rPr lang="en-AE" sz="1200" kern="1200" dirty="0">
-                <a:solidFill>
-                  <a:schemeClr val="tx1"/>
-                </a:solidFill>
-                <a:effectLst/>
-                <a:latin typeface="+mn-lt"/>
-                <a:ea typeface="+mn-ea"/>
-                <a:cs typeface="+mn-cs"/>
-              </a:rPr>
-              <a:t>The first objective is to engineer wind-aware diffusion features. These include wind alignment, transport potential, distance, and upwind PM2.5. The purpose of these features is to describe how pollution may physically move from one monitoring station to another.</a:t>
-            </a:r>
-          </a:p>
-          <a:p>
             <a:endParaRPr lang="en-AE" sz="1200" kern="1200" dirty="0">
               <a:solidFill>
                 <a:schemeClr val="tx1"/>
@@ -1465,45 +1392,6 @@
               <a:ea typeface="+mn-ea"/>
               <a:cs typeface="+mn-cs"/>
             </a:endParaRPr>
-          </a:p>
-          <a:p>
-            <a:r>
-              <a:rPr lang="en-AE" sz="1200" kern="1200" dirty="0">
-                <a:solidFill>
-                  <a:schemeClr val="tx1"/>
-                </a:solidFill>
-                <a:effectLst/>
-                <a:latin typeface="+mn-lt"/>
-                <a:ea typeface="+mn-ea"/>
-                <a:cs typeface="+mn-cs"/>
-              </a:rPr>
-              <a:t>The second objective is to test whether these features are useful across different types of models. Instead of only giving spatial information to a graph model, the same wind-aware feature set is also given to simpler models like Linear Regression and Random Forest, as well as sequence and graph-based models such as LSTM and STGNN. This helps us understand whether the improvement comes from the model architecture itself or from the physical information provided through the features.</a:t>
-            </a:r>
-          </a:p>
-          <a:p>
-            <a:endParaRPr lang="en-AE" sz="1200" kern="1200" dirty="0">
-              <a:solidFill>
-                <a:schemeClr val="tx1"/>
-              </a:solidFill>
-              <a:effectLst/>
-              <a:latin typeface="+mn-lt"/>
-              <a:ea typeface="+mn-ea"/>
-              <a:cs typeface="+mn-cs"/>
-            </a:endParaRPr>
-          </a:p>
-          <a:p>
-            <a:r>
-              <a:rPr lang="en-AE" sz="1200" kern="1200" dirty="0">
-                <a:solidFill>
-                  <a:schemeClr val="tx1"/>
-                </a:solidFill>
-                <a:effectLst/>
-                <a:latin typeface="+mn-lt"/>
-                <a:ea typeface="+mn-ea"/>
-                <a:cs typeface="+mn-cs"/>
-              </a:rPr>
-              <a:t>The third objective is to support real-time forecasting using an IoT streaming pipeline. The system is designed so that live air-quality and weather data can be processed through Kafka, converted into engineered features, and used to generate short-term PM2.5 forecasts continuously.</a:t>
-            </a:r>
           </a:p>
         </p:txBody>
       </p:sp>
@@ -1671,10 +1559,7 @@
           <a:bodyPr/>
           <a:lstStyle/>
           <a:p>
-            <a:r>
-              <a:rPr lang="en-US" dirty="0"/>
-              <a:t>Dataset: 25,535 hourly rows across 3 Toronto stations, July 2023 to June 2026. PM2.5 from OpenAQ archive, meteorology from Open-Meteo archive, merged on hourly timestamp. Missing meteorological observations matched via nearest weather station. Be ready to explain how missing PM2.5 is recovered live using neighbour stations and recent history.</a:t>
-            </a:r>
+            <a:endParaRPr lang="en-US" dirty="0"/>
           </a:p>
         </p:txBody>
       </p:sp>
@@ -1758,34 +1643,6 @@
           <a:bodyPr/>
           <a:lstStyle/>
           <a:p>
-            <a:r>
-              <a:rPr lang="en-AE" sz="1200" kern="1200" dirty="0">
-                <a:solidFill>
-                  <a:schemeClr val="tx1"/>
-                </a:solidFill>
-                <a:effectLst/>
-                <a:latin typeface="+mn-lt"/>
-                <a:ea typeface="+mn-ea"/>
-                <a:cs typeface="+mn-cs"/>
-              </a:rPr>
-              <a:t>In this project, each monitoring station is treated as a node in a graph. Downtown Toronto is the target station, while the North and West stations are neighbouring stations. The graph is written as:</a:t>
-            </a:r>
-          </a:p>
-          <a:p>
-            <a:r>
-              <a:rPr lang="en-AE" sz="1200" kern="1200" dirty="0">
-                <a:solidFill>
-                  <a:schemeClr val="tx1"/>
-                </a:solidFill>
-                <a:effectLst/>
-                <a:latin typeface="+mn-lt"/>
-                <a:ea typeface="+mn-ea"/>
-                <a:cs typeface="+mn-cs"/>
-              </a:rPr>
-              <a:t>Here, (V) represents the monitoring stations, (E) represents the possible directed connections between stations, and (A(t)) is the adjacency matrix at time (t).</a:t>
-            </a:r>
-          </a:p>
-          <a:p>
             <a:endParaRPr lang="en-AE" sz="1200" kern="1200" dirty="0">
               <a:solidFill>
                 <a:schemeClr val="tx1"/>
@@ -1795,59 +1652,6 @@
               <a:ea typeface="+mn-ea"/>
               <a:cs typeface="+mn-cs"/>
             </a:endParaRPr>
-          </a:p>
-          <a:p>
-            <a:r>
-              <a:rPr lang="en-AE" sz="1200" kern="1200" dirty="0">
-                <a:solidFill>
-                  <a:schemeClr val="tx1"/>
-                </a:solidFill>
-                <a:effectLst/>
-                <a:latin typeface="+mn-lt"/>
-                <a:ea typeface="+mn-ea"/>
-                <a:cs typeface="+mn-cs"/>
-              </a:rPr>
-              <a:t>The key idea is that this graph is not fixed. In a normal static graph, the connection between two stations would stay the same all the time. But in air pollution forecasting, that is not realistic because wind changes.</a:t>
-            </a:r>
-          </a:p>
-          <a:p>
-            <a:endParaRPr lang="en-AE" sz="1200" kern="1200" dirty="0">
-              <a:solidFill>
-                <a:schemeClr val="tx1"/>
-              </a:solidFill>
-              <a:effectLst/>
-              <a:latin typeface="+mn-lt"/>
-              <a:ea typeface="+mn-ea"/>
-              <a:cs typeface="+mn-cs"/>
-            </a:endParaRPr>
-          </a:p>
-          <a:p>
-            <a:r>
-              <a:rPr lang="en-AE" sz="1200" kern="1200" dirty="0">
-                <a:solidFill>
-                  <a:schemeClr val="tx1"/>
-                </a:solidFill>
-                <a:effectLst/>
-                <a:latin typeface="+mn-lt"/>
-                <a:ea typeface="+mn-ea"/>
-                <a:cs typeface="+mn-cs"/>
-              </a:rPr>
-              <a:t>For example, if the wind is blowing from the West station toward Downtown, then the West station should strongly influence Downtown because pollution can be transported in that direction. But if the wind reverses and blows from Downtown back toward the West, then the West station should have much weaker influence on Downtown.</a:t>
-            </a:r>
-          </a:p>
-          <a:p>
-            <a:r>
-              <a:rPr lang="en-AE" sz="1200" kern="1200" dirty="0">
-                <a:solidFill>
-                  <a:schemeClr val="tx1"/>
-                </a:solidFill>
-                <a:effectLst/>
-                <a:latin typeface="+mn-lt"/>
-                <a:ea typeface="+mn-ea"/>
-                <a:cs typeface="+mn-cs"/>
-              </a:rPr>
-              <a:t>So the graph becomes dynamic because the station-to-station influence changes at every time step depending on wind direction, wind alignment, and distance.</a:t>
-            </a:r>
           </a:p>
         </p:txBody>
       </p:sp>
@@ -1931,62 +1735,6 @@
           <a:bodyPr/>
           <a:lstStyle/>
           <a:p>
-            <a:r>
-              <a:rPr lang="en-AE" sz="1200" kern="1200" dirty="0">
-                <a:solidFill>
-                  <a:schemeClr val="tx1"/>
-                </a:solidFill>
-                <a:effectLst/>
-                <a:latin typeface="+mn-lt"/>
-                <a:ea typeface="+mn-ea"/>
-                <a:cs typeface="+mn-cs"/>
-              </a:rPr>
-              <a:t>This slide explains how the dynamic graph is built.</a:t>
-            </a:r>
-          </a:p>
-          <a:p>
-            <a:r>
-              <a:rPr lang="en-AE" sz="1200" kern="1200" dirty="0">
-                <a:solidFill>
-                  <a:schemeClr val="tx1"/>
-                </a:solidFill>
-                <a:effectLst/>
-                <a:latin typeface="+mn-lt"/>
-                <a:ea typeface="+mn-ea"/>
-                <a:cs typeface="+mn-cs"/>
-              </a:rPr>
-              <a:t>First, the system starts with the coordinates of each monitoring station, meaning latitude and longitude.</a:t>
-            </a:r>
-          </a:p>
-          <a:p>
-            <a:r>
-              <a:rPr lang="en-AE" sz="1200" kern="1200" dirty="0">
-                <a:solidFill>
-                  <a:schemeClr val="tx1"/>
-                </a:solidFill>
-                <a:effectLst/>
-                <a:latin typeface="+mn-lt"/>
-                <a:ea typeface="+mn-ea"/>
-                <a:cs typeface="+mn-cs"/>
-              </a:rPr>
-              <a:t>Second, it calculates the distance between each pair of stations using the Haversine formula. This tells us how far the stations are from each other on the Earth’s surface.</a:t>
-            </a:r>
-          </a:p>
-          <a:p>
-            <a:r>
-              <a:rPr lang="en-AE" sz="1200" kern="1200" dirty="0">
-                <a:solidFill>
-                  <a:schemeClr val="tx1"/>
-                </a:solidFill>
-                <a:effectLst/>
-                <a:latin typeface="+mn-lt"/>
-                <a:ea typeface="+mn-ea"/>
-                <a:cs typeface="+mn-cs"/>
-              </a:rPr>
-              <a:t>Third, distance alone is not enough, so the system also calculates direction. It converts the latitude and longitude difference into a local east and north displacement vector. In simple terms, this tells us whether one station is north, south, east, or west of another station.</a:t>
-            </a:r>
-          </a:p>
-          <a:p>
             <a:endParaRPr lang="en-AE" sz="1200" kern="1200" dirty="0">
               <a:solidFill>
                 <a:schemeClr val="tx1"/>
@@ -1996,59 +1744,6 @@
               <a:ea typeface="+mn-ea"/>
               <a:cs typeface="+mn-cs"/>
             </a:endParaRPr>
-          </a:p>
-          <a:p>
-            <a:r>
-              <a:rPr lang="en-AE" sz="1200" kern="1200" dirty="0">
-                <a:solidFill>
-                  <a:schemeClr val="tx1"/>
-                </a:solidFill>
-                <a:effectLst/>
-                <a:latin typeface="+mn-lt"/>
-                <a:ea typeface="+mn-ea"/>
-                <a:cs typeface="+mn-cs"/>
-              </a:rPr>
-              <a:t>Fourth, the wind is also converted into a vector using wind speed and wind direction. This is important because wind direction is circular. For example, 359 degrees and 1 degree are almost the same direction physically, but numerically they look very far apart. Converting wind into vector components avoids this problem.</a:t>
-            </a:r>
-          </a:p>
-          <a:p>
-            <a:endParaRPr lang="en-AE" sz="1200" kern="1200" dirty="0">
-              <a:solidFill>
-                <a:schemeClr val="tx1"/>
-              </a:solidFill>
-              <a:effectLst/>
-              <a:latin typeface="+mn-lt"/>
-              <a:ea typeface="+mn-ea"/>
-              <a:cs typeface="+mn-cs"/>
-            </a:endParaRPr>
-          </a:p>
-          <a:p>
-            <a:r>
-              <a:rPr lang="en-AE" sz="1200" kern="1200" dirty="0">
-                <a:solidFill>
-                  <a:schemeClr val="tx1"/>
-                </a:solidFill>
-                <a:effectLst/>
-                <a:latin typeface="+mn-lt"/>
-                <a:ea typeface="+mn-ea"/>
-                <a:cs typeface="+mn-cs"/>
-              </a:rPr>
-              <a:t>Finally, the station-to-station direction vector is compared with the wind vector using cosine similarity. This gives wind alignment. If the alignment is close to +1, the wind is moving from the source station toward the target station. If it is close to 0, the wind is mostly sideways. If it is close to -1, the wind is moving away from the target station.</a:t>
-            </a:r>
-          </a:p>
-          <a:p>
-            <a:r>
-              <a:rPr lang="en-AE" sz="1200" kern="1200" dirty="0">
-                <a:solidFill>
-                  <a:schemeClr val="tx1"/>
-                </a:solidFill>
-                <a:effectLst/>
-                <a:latin typeface="+mn-lt"/>
-                <a:ea typeface="+mn-ea"/>
-                <a:cs typeface="+mn-cs"/>
-              </a:rPr>
-              <a:t>So, in practical terms, alignment tells us whether the wind is helping pollution move toward the target station or not.</a:t>
-            </a:r>
           </a:p>
         </p:txBody>
       </p:sp>
@@ -2132,10 +1827,7 @@
           <a:bodyPr/>
           <a:lstStyle/>
           <a:p>
-            <a:r>
-              <a:rPr lang="en-US" dirty="0"/>
-              <a:t>k=10km is the DECAY_KM constant in the code. Walk through both parts separately, then the worked example which is the cleanest way to show this is dynamic: same two stations, same 5km distance, but edge weight goes from 0.606 (strong) to exactly 0 (none) purely because wind direction reversed.</a:t>
-            </a:r>
+            <a:endParaRPr lang="en-US" dirty="0"/>
           </a:p>
         </p:txBody>
       </p:sp>
@@ -2237,135 +1929,6 @@
           <a:bodyPr/>
           <a:lstStyle/>
           <a:p>
-            <a:r>
-              <a:rPr lang="en-AE" sz="1200" kern="1200" dirty="0">
-                <a:solidFill>
-                  <a:schemeClr val="tx1"/>
-                </a:solidFill>
-                <a:effectLst/>
-                <a:latin typeface="+mn-lt"/>
-                <a:ea typeface="+mn-ea"/>
-                <a:cs typeface="+mn-cs"/>
-              </a:rPr>
-              <a:t>This slide explains how the same wind-distance idea is converted into features for the forecasting models.</a:t>
-            </a:r>
-          </a:p>
-          <a:p>
-            <a:r>
-              <a:rPr lang="en-AE" sz="1200" kern="1200" dirty="0">
-                <a:solidFill>
-                  <a:schemeClr val="tx1"/>
-                </a:solidFill>
-                <a:effectLst/>
-                <a:latin typeface="+mn-lt"/>
-                <a:ea typeface="+mn-ea"/>
-                <a:cs typeface="+mn-cs"/>
-              </a:rPr>
-              <a:t>The system starts with raw station data such as PM2.5, wind, temperature, and humidity. Then it calculates the distance between stations and checks whether the wind is aligned with the path from a neighbouring station to the target station.</a:t>
-            </a:r>
-          </a:p>
-          <a:p>
-            <a:r>
-              <a:rPr lang="en-AE" sz="1200" kern="1200" dirty="0">
-                <a:solidFill>
-                  <a:schemeClr val="tx1"/>
-                </a:solidFill>
-                <a:effectLst/>
-                <a:latin typeface="+mn-lt"/>
-                <a:ea typeface="+mn-ea"/>
-                <a:cs typeface="+mn-cs"/>
-              </a:rPr>
-              <a:t>From this process, three important diffusion features are created.</a:t>
-            </a:r>
-          </a:p>
-          <a:p>
-            <a:r>
-              <a:rPr lang="en-AE" sz="1200" kern="1200" dirty="0">
-                <a:solidFill>
-                  <a:schemeClr val="tx1"/>
-                </a:solidFill>
-                <a:effectLst/>
-                <a:latin typeface="+mn-lt"/>
-                <a:ea typeface="+mn-ea"/>
-                <a:cs typeface="+mn-cs"/>
-              </a:rPr>
-              <a:t>The first is wind alignment. This tells us whether the wind is moving pollution toward or away from the target station.</a:t>
-            </a:r>
-          </a:p>
-          <a:p>
-            <a:r>
-              <a:rPr lang="en-AE" sz="1200" kern="1200" dirty="0">
-                <a:solidFill>
-                  <a:schemeClr val="tx1"/>
-                </a:solidFill>
-                <a:effectLst/>
-                <a:latin typeface="+mn-lt"/>
-                <a:ea typeface="+mn-ea"/>
-                <a:cs typeface="+mn-cs"/>
-              </a:rPr>
-              <a:t>The second is transport potential:</a:t>
-            </a:r>
-          </a:p>
-          <a:p>
-            <a:r>
-              <a:rPr lang="en-AE" sz="1200" kern="1200" dirty="0" err="1">
-                <a:solidFill>
-                  <a:schemeClr val="tx1"/>
-                </a:solidFill>
-                <a:effectLst/>
-                <a:latin typeface="+mn-lt"/>
-                <a:ea typeface="+mn-ea"/>
-                <a:cs typeface="+mn-cs"/>
-              </a:rPr>
-              <a:t>TransportPotential</a:t>
-            </a:r>
-            <a:r>
-              <a:rPr lang="en-AE" sz="1200" kern="1200" dirty="0">
-                <a:solidFill>
-                  <a:schemeClr val="tx1"/>
-                </a:solidFill>
-                <a:effectLst/>
-                <a:latin typeface="+mn-lt"/>
-                <a:ea typeface="+mn-ea"/>
-                <a:cs typeface="+mn-cs"/>
-              </a:rPr>
-              <a:t> = </a:t>
-            </a:r>
-            <a:r>
-              <a:rPr lang="en-AE" sz="1200" kern="1200" dirty="0" err="1">
-                <a:solidFill>
-                  <a:schemeClr val="tx1"/>
-                </a:solidFill>
-                <a:effectLst/>
-                <a:latin typeface="+mn-lt"/>
-                <a:ea typeface="+mn-ea"/>
-                <a:cs typeface="+mn-cs"/>
-              </a:rPr>
-              <a:t>WindSpeed</a:t>
-            </a:r>
-            <a:r>
-              <a:rPr lang="en-AE" sz="1200" kern="1200" dirty="0">
-                <a:solidFill>
-                  <a:schemeClr val="tx1"/>
-                </a:solidFill>
-                <a:effectLst/>
-                <a:latin typeface="+mn-lt"/>
-                <a:ea typeface="+mn-ea"/>
-                <a:cs typeface="+mn-cs"/>
-              </a:rPr>
-              <a:t> \times Alignment</a:t>
-            </a:r>
-            <a:br>
-              <a:rPr lang="en-AE" sz="1200" kern="1200" dirty="0">
-                <a:solidFill>
-                  <a:schemeClr val="tx1"/>
-                </a:solidFill>
-                <a:effectLst/>
-                <a:latin typeface="+mn-lt"/>
-                <a:ea typeface="+mn-ea"/>
-                <a:cs typeface="+mn-cs"/>
-              </a:rPr>
-            </a:br>
             <a:endParaRPr lang="en-AE" sz="1200" kern="1200" dirty="0">
               <a:solidFill>
                 <a:schemeClr val="tx1"/>
@@ -2375,182 +1938,6 @@
               <a:ea typeface="+mn-ea"/>
               <a:cs typeface="+mn-cs"/>
             </a:endParaRPr>
-          </a:p>
-          <a:p>
-            <a:r>
-              <a:rPr lang="en-AE" sz="1200" kern="1200" dirty="0">
-                <a:solidFill>
-                  <a:schemeClr val="tx1"/>
-                </a:solidFill>
-                <a:effectLst/>
-                <a:latin typeface="+mn-lt"/>
-                <a:ea typeface="+mn-ea"/>
-                <a:cs typeface="+mn-cs"/>
-              </a:rPr>
-              <a:t>This represents the wind-speed component that is actually moving toward the target. For example, strong wind is not useful if it is blowing in the wrong direction. Transport potential combines both wind strength and direction.</a:t>
-            </a:r>
-          </a:p>
-          <a:p>
-            <a:r>
-              <a:rPr lang="en-AE" sz="1200" kern="1200" dirty="0">
-                <a:solidFill>
-                  <a:schemeClr val="tx1"/>
-                </a:solidFill>
-                <a:effectLst/>
-                <a:latin typeface="+mn-lt"/>
-                <a:ea typeface="+mn-ea"/>
-                <a:cs typeface="+mn-cs"/>
-              </a:rPr>
-              <a:t>The third is upwind PM2.5:       </a:t>
-            </a:r>
-            <a:r>
-              <a:rPr lang="en-AE" sz="1200" kern="1200" dirty="0" err="1">
-                <a:solidFill>
-                  <a:schemeClr val="tx1"/>
-                </a:solidFill>
-                <a:effectLst/>
-                <a:latin typeface="+mn-lt"/>
-                <a:ea typeface="+mn-ea"/>
-                <a:cs typeface="+mn-cs"/>
-              </a:rPr>
-              <a:t>UpwindPM</a:t>
-            </a:r>
-            <a:r>
-              <a:rPr lang="en-AE" sz="1200" kern="1200" dirty="0">
-                <a:solidFill>
-                  <a:schemeClr val="tx1"/>
-                </a:solidFill>
-                <a:effectLst/>
-                <a:latin typeface="+mn-lt"/>
-                <a:ea typeface="+mn-ea"/>
-                <a:cs typeface="+mn-cs"/>
-              </a:rPr>
-              <a:t>_{2.5} =   \frac{\sum </a:t>
-            </a:r>
-            <a:r>
-              <a:rPr lang="en-AE" sz="1200" kern="1200" dirty="0" err="1">
-                <a:solidFill>
-                  <a:schemeClr val="tx1"/>
-                </a:solidFill>
-                <a:effectLst/>
-                <a:latin typeface="+mn-lt"/>
-                <a:ea typeface="+mn-ea"/>
-                <a:cs typeface="+mn-cs"/>
-              </a:rPr>
-              <a:t>Weight_i</a:t>
-            </a:r>
-            <a:r>
-              <a:rPr lang="en-AE" sz="1200" kern="1200" dirty="0">
-                <a:solidFill>
-                  <a:schemeClr val="tx1"/>
-                </a:solidFill>
-                <a:effectLst/>
-                <a:latin typeface="+mn-lt"/>
-                <a:ea typeface="+mn-ea"/>
-                <a:cs typeface="+mn-cs"/>
-              </a:rPr>
-              <a:t> \times PM_{2.5,i}}{\sum </a:t>
-            </a:r>
-            <a:r>
-              <a:rPr lang="en-AE" sz="1200" kern="1200" dirty="0" err="1">
-                <a:solidFill>
-                  <a:schemeClr val="tx1"/>
-                </a:solidFill>
-                <a:effectLst/>
-                <a:latin typeface="+mn-lt"/>
-                <a:ea typeface="+mn-ea"/>
-                <a:cs typeface="+mn-cs"/>
-              </a:rPr>
-              <a:t>Weight_i</a:t>
-            </a:r>
-            <a:r>
-              <a:rPr lang="en-AE" sz="1200" kern="1200" dirty="0">
-                <a:solidFill>
-                  <a:schemeClr val="tx1"/>
-                </a:solidFill>
-                <a:effectLst/>
-                <a:latin typeface="+mn-lt"/>
-                <a:ea typeface="+mn-ea"/>
-                <a:cs typeface="+mn-cs"/>
-              </a:rPr>
-              <a:t>}</a:t>
-            </a:r>
-            <a:br>
-              <a:rPr lang="en-AE" sz="1200" kern="1200" dirty="0">
-                <a:solidFill>
-                  <a:schemeClr val="tx1"/>
-                </a:solidFill>
-                <a:effectLst/>
-                <a:latin typeface="+mn-lt"/>
-                <a:ea typeface="+mn-ea"/>
-                <a:cs typeface="+mn-cs"/>
-              </a:rPr>
-            </a:br>
-            <a:endParaRPr lang="en-AE" sz="1200" kern="1200" dirty="0">
-              <a:solidFill>
-                <a:schemeClr val="tx1"/>
-              </a:solidFill>
-              <a:effectLst/>
-              <a:latin typeface="+mn-lt"/>
-              <a:ea typeface="+mn-ea"/>
-              <a:cs typeface="+mn-cs"/>
-            </a:endParaRPr>
-          </a:p>
-          <a:p>
-            <a:r>
-              <a:rPr lang="en-AE" sz="1200" kern="1200" dirty="0">
-                <a:solidFill>
-                  <a:schemeClr val="tx1"/>
-                </a:solidFill>
-                <a:effectLst/>
-                <a:latin typeface="+mn-lt"/>
-                <a:ea typeface="+mn-ea"/>
-                <a:cs typeface="+mn-cs"/>
-              </a:rPr>
-              <a:t>This is a weighted average of PM2.5 from neighbouring stations. A station that is closer and upwind receives more weight, while a station that is farther away or downwind receives less weight.</a:t>
-            </a:r>
-          </a:p>
-          <a:p>
-            <a:r>
-              <a:rPr lang="en-AE" sz="1200" kern="1200" dirty="0">
-                <a:solidFill>
-                  <a:schemeClr val="tx1"/>
-                </a:solidFill>
-                <a:effectLst/>
-                <a:latin typeface="+mn-lt"/>
-                <a:ea typeface="+mn-ea"/>
-                <a:cs typeface="+mn-cs"/>
-              </a:rPr>
-              <a:t>For example, if the West station has high PM2.5 and the wind is blowing from West toward Downtown, then upwind PM2.5 will become high. This tells the model that polluted air may be arriving at Downtown soon.</a:t>
-            </a:r>
-          </a:p>
-          <a:p>
-            <a:r>
-              <a:rPr lang="en-AE" sz="1200" kern="1200" dirty="0">
-                <a:solidFill>
-                  <a:schemeClr val="tx1"/>
-                </a:solidFill>
-                <a:effectLst/>
-                <a:latin typeface="+mn-lt"/>
-                <a:ea typeface="+mn-ea"/>
-                <a:cs typeface="+mn-cs"/>
-              </a:rPr>
-              <a:t>These diffusion features are then given to all forecasting models, including Linear Regression, Random Forest, LSTM, and STGNN. This makes the comparison fair because every model receives the same physical transport information. The project can then test whether simple models can perform competitively when they are given meaningful wind-aware features.</a:t>
-            </a:r>
-          </a:p>
-          <a:p>
-            <a:r>
-              <a:rPr lang="en-AE" sz="1200" kern="1200" dirty="0">
-                <a:solidFill>
-                  <a:schemeClr val="tx1"/>
-                </a:solidFill>
-                <a:effectLst/>
-                <a:latin typeface="+mn-lt"/>
-                <a:ea typeface="+mn-ea"/>
-                <a:cs typeface="+mn-cs"/>
-              </a:rPr>
-              <a:t> </a:t>
-            </a:r>
           </a:p>
         </p:txBody>
       </p:sp>
@@ -2640,10 +2027,7 @@
           <a:bodyPr/>
           <a:lstStyle/>
           <a:p>
-            <a:r>
-              <a:rPr lang="en-US" dirty="0"/>
-              <a:t>This is the rubric's Demo Effectiveness criterion (3 marks) — practice this live segment separately and time it. Show the actual Kafka topics with a CLI consumer or the dashboard, not just slides. If live demo isn't possible, have a recorded screen-capture ready as backup and say so explicitly rather than skipping it.</a:t>
-            </a:r>
+            <a:endParaRPr lang="en-US" dirty="0"/>
           </a:p>
         </p:txBody>
       </p:sp>
@@ -19003,8 +18387,8 @@
           </a:ln>
         </p:spPr>
       </p:pic>
-      <mc:AlternateContent xmlns:mc="http://schemas.openxmlformats.org/markup-compatibility/2006">
-        <mc:Choice xmlns:p14="http://schemas.microsoft.com/office/powerpoint/2010/main" Requires="p14">
+      <mc:AlternateContent xmlns:mc="http://schemas.openxmlformats.org/markup-compatibility/2006" xmlns:p14="http://schemas.microsoft.com/office/powerpoint/2010/main">
+        <mc:Choice Requires="p14">
           <p:contentPart p14:bwMode="auto" r:id="rId5">
             <p14:nvContentPartPr>
               <p14:cNvPr id="11" name="Ink 10">
@@ -19023,7 +18407,7 @@
             </p14:xfrm>
           </p:contentPart>
         </mc:Choice>
-        <mc:Fallback>
+        <mc:Fallback xmlns="">
           <p:pic>
             <p:nvPicPr>
               <p:cNvPr id="11" name="Ink 10">
@@ -19054,8 +18438,8 @@
           </p:pic>
         </mc:Fallback>
       </mc:AlternateContent>
-      <mc:AlternateContent xmlns:mc="http://schemas.openxmlformats.org/markup-compatibility/2006">
-        <mc:Choice xmlns:p14="http://schemas.microsoft.com/office/powerpoint/2010/main" Requires="p14">
+      <mc:AlternateContent xmlns:mc="http://schemas.openxmlformats.org/markup-compatibility/2006" xmlns:p14="http://schemas.microsoft.com/office/powerpoint/2010/main">
+        <mc:Choice Requires="p14">
           <p:contentPart p14:bwMode="auto" r:id="rId7">
             <p14:nvContentPartPr>
               <p14:cNvPr id="12" name="Ink 11">
@@ -19074,7 +18458,7 @@
             </p14:xfrm>
           </p:contentPart>
         </mc:Choice>
-        <mc:Fallback>
+        <mc:Fallback xmlns="">
           <p:pic>
             <p:nvPicPr>
               <p:cNvPr id="12" name="Ink 11">
@@ -19105,8 +18489,8 @@
           </p:pic>
         </mc:Fallback>
       </mc:AlternateContent>
-      <mc:AlternateContent xmlns:mc="http://schemas.openxmlformats.org/markup-compatibility/2006">
-        <mc:Choice xmlns:p14="http://schemas.microsoft.com/office/powerpoint/2010/main" Requires="p14">
+      <mc:AlternateContent xmlns:mc="http://schemas.openxmlformats.org/markup-compatibility/2006" xmlns:p14="http://schemas.microsoft.com/office/powerpoint/2010/main">
+        <mc:Choice Requires="p14">
           <p:contentPart p14:bwMode="auto" r:id="rId9">
             <p14:nvContentPartPr>
               <p14:cNvPr id="13" name="Ink 12">
@@ -19125,7 +18509,7 @@
             </p14:xfrm>
           </p:contentPart>
         </mc:Choice>
-        <mc:Fallback>
+        <mc:Fallback xmlns="">
           <p:pic>
             <p:nvPicPr>
               <p:cNvPr id="13" name="Ink 12">
@@ -19176,8 +18560,8 @@
             <a:chExt cx="10800" cy="111960"/>
           </a:xfrm>
         </p:grpSpPr>
-        <mc:AlternateContent xmlns:mc="http://schemas.openxmlformats.org/markup-compatibility/2006">
-          <mc:Choice xmlns:p14="http://schemas.microsoft.com/office/powerpoint/2010/main" Requires="p14">
+        <mc:AlternateContent xmlns:mc="http://schemas.openxmlformats.org/markup-compatibility/2006" xmlns:p14="http://schemas.microsoft.com/office/powerpoint/2010/main">
+          <mc:Choice Requires="p14">
             <p:contentPart p14:bwMode="auto" r:id="rId11">
               <p14:nvContentPartPr>
                 <p14:cNvPr id="15" name="Ink 14">
@@ -19196,7 +18580,7 @@
               </p14:xfrm>
             </p:contentPart>
           </mc:Choice>
-          <mc:Fallback>
+          <mc:Fallback xmlns="">
             <p:pic>
               <p:nvPicPr>
                 <p:cNvPr id="15" name="Ink 14">
@@ -19227,8 +18611,8 @@
             </p:pic>
           </mc:Fallback>
         </mc:AlternateContent>
-        <mc:AlternateContent xmlns:mc="http://schemas.openxmlformats.org/markup-compatibility/2006">
-          <mc:Choice xmlns:p14="http://schemas.microsoft.com/office/powerpoint/2010/main" Requires="p14">
+        <mc:AlternateContent xmlns:mc="http://schemas.openxmlformats.org/markup-compatibility/2006" xmlns:p14="http://schemas.microsoft.com/office/powerpoint/2010/main">
+          <mc:Choice Requires="p14">
             <p:contentPart p14:bwMode="auto" r:id="rId13">
               <p14:nvContentPartPr>
                 <p14:cNvPr id="16" name="Ink 15">
@@ -19247,7 +18631,7 @@
               </p14:xfrm>
             </p:contentPart>
           </mc:Choice>
-          <mc:Fallback>
+          <mc:Fallback xmlns="">
             <p:pic>
               <p:nvPicPr>
                 <p:cNvPr id="16" name="Ink 15">
@@ -19278,8 +18662,8 @@
             </p:pic>
           </mc:Fallback>
         </mc:AlternateContent>
-        <mc:AlternateContent xmlns:mc="http://schemas.openxmlformats.org/markup-compatibility/2006">
-          <mc:Choice xmlns:p14="http://schemas.microsoft.com/office/powerpoint/2010/main" Requires="p14">
+        <mc:AlternateContent xmlns:mc="http://schemas.openxmlformats.org/markup-compatibility/2006" xmlns:p14="http://schemas.microsoft.com/office/powerpoint/2010/main">
+          <mc:Choice Requires="p14">
             <p:contentPart p14:bwMode="auto" r:id="rId14">
               <p14:nvContentPartPr>
                 <p14:cNvPr id="18" name="Ink 17">
@@ -19298,7 +18682,7 @@
               </p14:xfrm>
             </p:contentPart>
           </mc:Choice>
-          <mc:Fallback>
+          <mc:Fallback xmlns="">
             <p:pic>
               <p:nvPicPr>
                 <p:cNvPr id="18" name="Ink 17">
